--- a/fixtures/sample-editor-change-layout.pptx
+++ b/fixtures/sample-editor-change-layout.pptx
@@ -323,6 +323,7 @@
   <p:clrMapOvr>
     <a:masterClrMapping/>
   </p:clrMapOvr>
+  <p:transition advTm="3000"/>
 </p:sldLayout>
 </file>
 
@@ -623,6 +624,28 @@
   <p:clrMapOvr>
     <a:masterClrMapping/>
   </p:clrMapOvr>
+  <mc:AlternateContent xmlns:mc="http://schemas.openxmlformats.org/markup-compatibility/2006">
+    <mc:Choice xmlns:p14="http://schemas.microsoft.com/office/powerpoint/2010/main" Requires="p14">
+      <p:extLst/>
+    </mc:Choice>
+    <mc:Fallback>
+      <p:transition>
+        <p:cut/>
+      </p:transition>
+    </mc:Fallback>
+  </mc:AlternateContent>
+  <mc:AlternateContent xmlns:mc="http://schemas.openxmlformats.org/markup-compatibility/2006">
+    <mc:Choice xmlns:p200="urn:web-ppt:future" Requires="p200">
+      <p:transition>
+        <p200:futureEffect/>
+      </p:transition>
+    </mc:Choice>
+    <mc:Fallback>
+      <p:transition spd="fast">
+        <p:push dir="r"/>
+      </p:transition>
+    </mc:Fallback>
+  </mc:AlternateContent>
 </p:sldLayout>
 </file>
 

--- a/fixtures/sample-editor-change-layout.pptx
+++ b/fixtures/sample-editor-change-layout.pptx
@@ -876,7 +876,12 @@
         </p:style>
         <p:txBody>
           <a:bodyPr anchor="ctr"/>
-          <a:lstStyle/>
+          <a:lstStyle>
+            <a:lvl3pPr marL="1714500" indent="-190500">
+              <a:buChar char="☞"/>
+              <a:defRPr sz="2100"/>
+            </a:lvl3pPr>
+          </a:lstStyle>
           <a:p>
             <a:r>
               <a:rPr sz="2400" baseline="0" spc="0">

--- a/fixtures/sample-editor-change-layout.pptx
+++ b/fixtures/sample-editor-change-layout.pptx
@@ -317,6 +317,25 @@
             </a:r>
           </a:p>
         </p:txBody>
+      </p:sp>
+      <p:sp>
+        <p:nvSpPr>
+          <p:cNvPr id="95" name="版式末页链接">
+            <a:hlinkClick action="ppaction://hlinkshowjump?jump=lastslide"/>
+          </p:cNvPr>
+          <p:cNvSpPr/>
+          <p:nvPr/>
+        </p:nvSpPr>
+        <p:spPr>
+          <a:xfrm>
+            <a:off x="11239500" y="190500"/>
+            <a:ext cx="190500" cy="190500"/>
+          </a:xfrm>
+          <a:prstGeom prst="rect">
+            <a:avLst/>
+          </a:prstGeom>
+          <a:noFill/>
+        </p:spPr>
       </p:sp>
     </p:spTree>
   </p:cSld>

--- a/fixtures/sample-editor-change-layout.pptx
+++ b/fixtures/sample-editor-change-layout.pptx
@@ -766,7 +766,9 @@
       </p:grpSpPr>
       <p:sp>
         <p:nvSpPr>
-          <p:cNvPr id="160" name="目标母版标记"/>
+          <p:cNvPr id="160" name="目标母版标记">
+            <a:hlinkClick action="ppaction://hlinkshowjump?jump=lastslide"/>
+          </p:cNvPr>
           <p:cNvSpPr/>
           <p:nvPr/>
         </p:nvSpPr>
